--- a/AIA_Architecte_Intelligence_Artificielle/Bloc_3_Pipeline_IA/project_summary_details/overall_architecture/Architecture_Fraud_Detection.pptx
+++ b/AIA_Architecte_Intelligence_Artificielle/Bloc_3_Pipeline_IA/project_summary_details/overall_architecture/Architecture_Fraud_Detection.pptx
@@ -6687,9 +6687,15 @@
                 <a:solidFill>
                   <a:schemeClr val="accent1"/>
                 </a:solidFill>
+                <a:hlinkClick r:id="rId29"/>
               </a:rPr>
               <a:t>LIEN</a:t>
             </a:r>
+            <a:endParaRPr lang="fr-FR" sz="1100" b="1" u="sng" dirty="0">
+              <a:solidFill>
+                <a:schemeClr val="accent1"/>
+              </a:solidFill>
+            </a:endParaRPr>
           </a:p>
         </p:txBody>
       </p:sp>
@@ -7189,7 +7195,7 @@
                 <a:solidFill>
                   <a:schemeClr val="accent1"/>
                 </a:solidFill>
-                <a:hlinkClick r:id="rId29">
+                <a:hlinkClick r:id="rId30">
                   <a:extLst>
                     <a:ext uri="{A12FA001-AC4F-418D-AE19-62706E023703}">
                       <ahyp:hlinkClr xmlns:ahyp="http://schemas.microsoft.com/office/drawing/2018/hyperlinkcolor" val="tx"/>

--- a/AIA_Architecte_Intelligence_Artificielle/Bloc_3_Pipeline_IA/project_summary_details/overall_architecture/Architecture_Fraud_Detection.pptx
+++ b/AIA_Architecte_Intelligence_Artificielle/Bloc_3_Pipeline_IA/project_summary_details/overall_architecture/Architecture_Fraud_Detection.pptx
@@ -197,7 +197,7 @@
           <a:p>
             <a:fld id="{9C62B7FE-2222-434C-9341-6E093E2CFAA4}" type="datetimeFigureOut">
               <a:rPr lang="fr-FR" smtClean="0"/>
-              <a:t>27/09/2025</a:t>
+              <a:t>16/11/2025</a:t>
             </a:fld>
             <a:endParaRPr lang="fr-FR"/>
           </a:p>
@@ -611,7 +611,7 @@
           <a:p>
             <a:fld id="{1B006B2C-3CAE-4EA5-9F5D-D2B76FE68327}" type="datetimeFigureOut">
               <a:rPr lang="fr-FR" smtClean="0"/>
-              <a:t>27/09/2025</a:t>
+              <a:t>16/11/2025</a:t>
             </a:fld>
             <a:endParaRPr lang="fr-FR"/>
           </a:p>
@@ -809,7 +809,7 @@
           <a:p>
             <a:fld id="{1B006B2C-3CAE-4EA5-9F5D-D2B76FE68327}" type="datetimeFigureOut">
               <a:rPr lang="fr-FR" smtClean="0"/>
-              <a:t>27/09/2025</a:t>
+              <a:t>16/11/2025</a:t>
             </a:fld>
             <a:endParaRPr lang="fr-FR"/>
           </a:p>
@@ -1017,7 +1017,7 @@
           <a:p>
             <a:fld id="{1B006B2C-3CAE-4EA5-9F5D-D2B76FE68327}" type="datetimeFigureOut">
               <a:rPr lang="fr-FR" smtClean="0"/>
-              <a:t>27/09/2025</a:t>
+              <a:t>16/11/2025</a:t>
             </a:fld>
             <a:endParaRPr lang="fr-FR"/>
           </a:p>
@@ -1215,7 +1215,7 @@
           <a:p>
             <a:fld id="{1B006B2C-3CAE-4EA5-9F5D-D2B76FE68327}" type="datetimeFigureOut">
               <a:rPr lang="fr-FR" smtClean="0"/>
-              <a:t>27/09/2025</a:t>
+              <a:t>16/11/2025</a:t>
             </a:fld>
             <a:endParaRPr lang="fr-FR"/>
           </a:p>
@@ -1490,7 +1490,7 @@
           <a:p>
             <a:fld id="{1B006B2C-3CAE-4EA5-9F5D-D2B76FE68327}" type="datetimeFigureOut">
               <a:rPr lang="fr-FR" smtClean="0"/>
-              <a:t>27/09/2025</a:t>
+              <a:t>16/11/2025</a:t>
             </a:fld>
             <a:endParaRPr lang="fr-FR"/>
           </a:p>
@@ -1755,7 +1755,7 @@
           <a:p>
             <a:fld id="{1B006B2C-3CAE-4EA5-9F5D-D2B76FE68327}" type="datetimeFigureOut">
               <a:rPr lang="fr-FR" smtClean="0"/>
-              <a:t>27/09/2025</a:t>
+              <a:t>16/11/2025</a:t>
             </a:fld>
             <a:endParaRPr lang="fr-FR"/>
           </a:p>
@@ -2167,7 +2167,7 @@
           <a:p>
             <a:fld id="{1B006B2C-3CAE-4EA5-9F5D-D2B76FE68327}" type="datetimeFigureOut">
               <a:rPr lang="fr-FR" smtClean="0"/>
-              <a:t>27/09/2025</a:t>
+              <a:t>16/11/2025</a:t>
             </a:fld>
             <a:endParaRPr lang="fr-FR"/>
           </a:p>
@@ -2308,7 +2308,7 @@
           <a:p>
             <a:fld id="{1B006B2C-3CAE-4EA5-9F5D-D2B76FE68327}" type="datetimeFigureOut">
               <a:rPr lang="fr-FR" smtClean="0"/>
-              <a:t>27/09/2025</a:t>
+              <a:t>16/11/2025</a:t>
             </a:fld>
             <a:endParaRPr lang="fr-FR"/>
           </a:p>
@@ -2421,7 +2421,7 @@
           <a:p>
             <a:fld id="{1B006B2C-3CAE-4EA5-9F5D-D2B76FE68327}" type="datetimeFigureOut">
               <a:rPr lang="fr-FR" smtClean="0"/>
-              <a:t>27/09/2025</a:t>
+              <a:t>16/11/2025</a:t>
             </a:fld>
             <a:endParaRPr lang="fr-FR"/>
           </a:p>
@@ -2732,7 +2732,7 @@
           <a:p>
             <a:fld id="{1B006B2C-3CAE-4EA5-9F5D-D2B76FE68327}" type="datetimeFigureOut">
               <a:rPr lang="fr-FR" smtClean="0"/>
-              <a:t>27/09/2025</a:t>
+              <a:t>16/11/2025</a:t>
             </a:fld>
             <a:endParaRPr lang="fr-FR"/>
           </a:p>
@@ -3020,7 +3020,7 @@
           <a:p>
             <a:fld id="{1B006B2C-3CAE-4EA5-9F5D-D2B76FE68327}" type="datetimeFigureOut">
               <a:rPr lang="fr-FR" smtClean="0"/>
-              <a:t>27/09/2025</a:t>
+              <a:t>16/11/2025</a:t>
             </a:fld>
             <a:endParaRPr lang="fr-FR"/>
           </a:p>
@@ -3261,7 +3261,7 @@
           <a:p>
             <a:fld id="{1B006B2C-3CAE-4EA5-9F5D-D2B76FE68327}" type="datetimeFigureOut">
               <a:rPr lang="fr-FR" smtClean="0"/>
-              <a:t>27/09/2025</a:t>
+              <a:t>16/11/2025</a:t>
             </a:fld>
             <a:endParaRPr lang="fr-FR"/>
           </a:p>
